--- a/public/fun/cards/office/office-03.pptx
+++ b/public/fun/cards/office/office-03.pptx
@@ -3099,20 +3099,20 @@
       <p:grpSpPr/>
       <p:sp>
         <p:nvSpPr>
-          <p:cNvPr id="2" name="Rectangle 1"/>
+          <p:cNvPr id="2" name="Oval 1"/>
           <p:cNvSpPr/>
           <p:nvPr/>
         </p:nvSpPr>
         <p:spPr>
           <a:xfrm>
-            <a:off x="0" y="0"/>
-            <a:ext cx="3240000" cy="720000"/>
+            <a:off x="1591200" y="208800"/>
+            <a:ext cx="57600" cy="57600"/>
           </a:xfrm>
-          <a:prstGeom prst="rect">
+          <a:prstGeom prst="ellipse">
             <a:avLst/>
           </a:prstGeom>
           <a:solidFill>
-            <a:srgbClr val="D1617D"/>
+            <a:srgbClr val="2E9BFF"/>
           </a:solidFill>
           <a:ln>
             <a:noFill/>
@@ -3128,188 +3128,14 @@
       </p:sp>
       <p:sp>
         <p:nvSpPr>
-          <p:cNvPr id="3" name="Rectangle 2"/>
-          <p:cNvSpPr/>
+          <p:cNvPr id="3" name="텍스트"/>
+          <p:cNvSpPr txBox="1"/>
           <p:nvPr/>
         </p:nvSpPr>
         <p:spPr>
           <a:xfrm>
-            <a:off x="2816352" y="201024"/>
-            <a:ext cx="55296" cy="317952"/>
-          </a:xfrm>
-          <a:prstGeom prst="rect">
-            <a:avLst/>
-          </a:prstGeom>
-          <a:solidFill>
-            <a:srgbClr val="FFFFFF"/>
-          </a:solidFill>
-          <a:ln>
-            <a:noFill/>
-          </a:ln>
-        </p:spPr>
-        <p:txBody>
-          <a:bodyPr rtlCol="0" anchor="ctr"/>
-          <a:lstStyle/>
-          <a:p>
-            <a:pPr algn="ctr"/>
-          </a:p>
-        </p:txBody>
-      </p:sp>
-      <p:sp>
-        <p:nvSpPr>
-          <p:cNvPr id="4" name="Rectangle 3"/>
-          <p:cNvSpPr/>
-          <p:nvPr/>
-        </p:nvSpPr>
-        <p:spPr>
-          <a:xfrm rot="2700000">
-            <a:off x="2816352" y="201024"/>
-            <a:ext cx="55296" cy="317952"/>
-          </a:xfrm>
-          <a:prstGeom prst="rect">
-            <a:avLst/>
-          </a:prstGeom>
-          <a:solidFill>
-            <a:srgbClr val="FFFFFF"/>
-          </a:solidFill>
-          <a:ln>
-            <a:noFill/>
-          </a:ln>
-        </p:spPr>
-        <p:txBody>
-          <a:bodyPr rtlCol="0" anchor="ctr"/>
-          <a:lstStyle/>
-          <a:p>
-            <a:pPr algn="ctr"/>
-          </a:p>
-        </p:txBody>
-      </p:sp>
-      <p:sp>
-        <p:nvSpPr>
-          <p:cNvPr id="5" name="Rectangle 4"/>
-          <p:cNvSpPr/>
-          <p:nvPr/>
-        </p:nvSpPr>
-        <p:spPr>
-          <a:xfrm rot="5400000">
-            <a:off x="2816352" y="201024"/>
-            <a:ext cx="55296" cy="317952"/>
-          </a:xfrm>
-          <a:prstGeom prst="rect">
-            <a:avLst/>
-          </a:prstGeom>
-          <a:solidFill>
-            <a:srgbClr val="FFFFFF"/>
-          </a:solidFill>
-          <a:ln>
-            <a:noFill/>
-          </a:ln>
-        </p:spPr>
-        <p:txBody>
-          <a:bodyPr rtlCol="0" anchor="ctr"/>
-          <a:lstStyle/>
-          <a:p>
-            <a:pPr algn="ctr"/>
-          </a:p>
-        </p:txBody>
-      </p:sp>
-      <p:sp>
-        <p:nvSpPr>
-          <p:cNvPr id="6" name="Rectangle 5"/>
-          <p:cNvSpPr/>
-          <p:nvPr/>
-        </p:nvSpPr>
-        <p:spPr>
-          <a:xfrm rot="8100000">
-            <a:off x="2816352" y="201024"/>
-            <a:ext cx="55296" cy="317952"/>
-          </a:xfrm>
-          <a:prstGeom prst="rect">
-            <a:avLst/>
-          </a:prstGeom>
-          <a:solidFill>
-            <a:srgbClr val="FFFFFF"/>
-          </a:solidFill>
-          <a:ln>
-            <a:noFill/>
-          </a:ln>
-        </p:spPr>
-        <p:txBody>
-          <a:bodyPr rtlCol="0" anchor="ctr"/>
-          <a:lstStyle/>
-          <a:p>
-            <a:pPr algn="ctr"/>
-          </a:p>
-        </p:txBody>
-      </p:sp>
-      <p:sp>
-        <p:nvSpPr>
-          <p:cNvPr id="7" name="Oval 6"/>
-          <p:cNvSpPr/>
-          <p:nvPr/>
-        </p:nvSpPr>
-        <p:spPr>
-          <a:xfrm>
-            <a:off x="2747232" y="263232"/>
-            <a:ext cx="193536" cy="193536"/>
-          </a:xfrm>
-          <a:prstGeom prst="ellipse">
-            <a:avLst/>
-          </a:prstGeom>
-          <a:solidFill>
-            <a:srgbClr val="FFFFFF"/>
-          </a:solidFill>
-          <a:ln>
-            <a:noFill/>
-          </a:ln>
-        </p:spPr>
-        <p:txBody>
-          <a:bodyPr rtlCol="0" anchor="ctr"/>
-          <a:lstStyle/>
-          <a:p>
-            <a:pPr algn="ctr"/>
-          </a:p>
-        </p:txBody>
-      </p:sp>
-      <p:sp>
-        <p:nvSpPr>
-          <p:cNvPr id="8" name="Oval 7"/>
-          <p:cNvSpPr/>
-          <p:nvPr/>
-        </p:nvSpPr>
-        <p:spPr>
-          <a:xfrm>
-            <a:off x="2802528" y="318528"/>
-            <a:ext cx="82944" cy="82944"/>
-          </a:xfrm>
-          <a:prstGeom prst="ellipse">
-            <a:avLst/>
-          </a:prstGeom>
-          <a:solidFill>
-            <a:srgbClr val="737373"/>
-          </a:solidFill>
-          <a:ln>
-            <a:noFill/>
-          </a:ln>
-        </p:spPr>
-        <p:txBody>
-          <a:bodyPr rtlCol="0" anchor="ctr"/>
-          <a:lstStyle/>
-          <a:p>
-            <a:pPr algn="ctr"/>
-          </a:p>
-        </p:txBody>
-      </p:sp>
-      <p:sp>
-        <p:nvSpPr>
-          <p:cNvPr id="9" name="텍스트"/>
-          <p:cNvSpPr txBox="1"/>
-          <p:nvPr/>
-        </p:nvSpPr>
-        <p:spPr>
-          <a:xfrm>
-            <a:off x="230400" y="187200"/>
-            <a:ext cx="2160000" cy="305437"/>
+            <a:off x="360000" y="468000"/>
+            <a:ext cx="2520000" cy="360000"/>
           </a:xfrm>
           <a:prstGeom prst="rect">
             <a:avLst/>
@@ -3322,15 +3148,15 @@
           </a:bodyPr>
           <a:lstStyle/>
           <a:p>
-            <a:pPr algn="l">
+            <a:pPr algn="ctr">
               <a:lnSpc>
-                <a:spcPts val="2682"/>
+                <a:spcPts val="3190"/>
               </a:lnSpc>
             </a:pPr>
             <a:r>
-              <a:rPr sz="1850" b="1" spc="50">
+              <a:rPr sz="2200" b="1">
                 <a:solidFill>
-                  <a:srgbClr val="FFFFFF"/>
+                  <a:srgbClr val="12151C"/>
                 </a:solidFill>
                 <a:latin typeface="맑은 고딕"/>
                 <a:ea typeface="맑은 고딕"/>
@@ -3342,14 +3168,14 @@
       </p:sp>
       <p:sp>
         <p:nvSpPr>
-          <p:cNvPr id="10" name="텍스트"/>
+          <p:cNvPr id="4" name="텍스트"/>
           <p:cNvSpPr txBox="1"/>
           <p:nvPr/>
         </p:nvSpPr>
         <p:spPr>
           <a:xfrm>
-            <a:off x="230400" y="475200"/>
-            <a:ext cx="2160000" cy="122400"/>
+            <a:off x="360000" y="878400"/>
+            <a:ext cx="2520000" cy="171451"/>
           </a:xfrm>
           <a:prstGeom prst="rect">
             <a:avLst/>
@@ -3362,15 +3188,15 @@
           </a:bodyPr>
           <a:lstStyle/>
           <a:p>
-            <a:pPr algn="l">
+            <a:pPr algn="ctr">
               <a:lnSpc>
-                <a:spcPts val="1232"/>
+                <a:spcPts val="1305"/>
               </a:lnSpc>
             </a:pPr>
             <a:r>
-              <a:rPr sz="850" b="1">
+              <a:rPr sz="900" b="0">
                 <a:solidFill>
-                  <a:srgbClr val="FFFFFF"/>
+                  <a:srgbClr val="6B7280"/>
                 </a:solidFill>
                 <a:latin typeface="맑은 고딕"/>
                 <a:ea typeface="맑은 고딕"/>
@@ -3382,14 +3208,43 @@
       </p:sp>
       <p:sp>
         <p:nvSpPr>
-          <p:cNvPr id="11" name="텍스트"/>
+          <p:cNvPr id="5" name="Rectangle 4"/>
+          <p:cNvSpPr/>
+          <p:nvPr/>
+        </p:nvSpPr>
+        <p:spPr>
+          <a:xfrm>
+            <a:off x="1530000" y="1137600"/>
+            <a:ext cx="180000" cy="14400"/>
+          </a:xfrm>
+          <a:prstGeom prst="rect">
+            <a:avLst/>
+          </a:prstGeom>
+          <a:solidFill>
+            <a:srgbClr val="2E9BFF"/>
+          </a:solidFill>
+          <a:ln>
+            <a:noFill/>
+          </a:ln>
+        </p:spPr>
+        <p:txBody>
+          <a:bodyPr rtlCol="0" anchor="ctr"/>
+          <a:lstStyle/>
+          <a:p>
+            <a:pPr algn="ctr"/>
+          </a:p>
+        </p:txBody>
+      </p:sp>
+      <p:sp>
+        <p:nvSpPr>
+          <p:cNvPr id="6" name="텍스트"/>
           <p:cNvSpPr txBox="1"/>
           <p:nvPr/>
         </p:nvSpPr>
         <p:spPr>
           <a:xfrm>
-            <a:off x="230400" y="835200"/>
-            <a:ext cx="1800000" cy="100800"/>
+            <a:off x="360000" y="1267200"/>
+            <a:ext cx="2520000" cy="133351"/>
           </a:xfrm>
           <a:prstGeom prst="rect">
             <a:avLst/>
@@ -3402,34 +3257,34 @@
           </a:bodyPr>
           <a:lstStyle/>
           <a:p>
-            <a:pPr algn="l">
+            <a:pPr algn="ctr">
               <a:lnSpc>
-                <a:spcPts val="1087"/>
+                <a:spcPts val="1015"/>
               </a:lnSpc>
             </a:pPr>
             <a:r>
-              <a:rPr sz="750" b="1" spc="150">
+              <a:rPr sz="700" b="0">
                 <a:solidFill>
-                  <a:srgbClr val="9A5F6E"/>
+                  <a:srgbClr val="12151C"/>
                 </a:solidFill>
                 <a:latin typeface="맑은 고딕"/>
                 <a:ea typeface="맑은 고딕"/>
               </a:rPr>
-              <a:t>회사명 · 부서명</a:t>
-            </a:r>
-          </a:p>
-        </p:txBody>
-      </p:sp>
-      <p:sp>
-        <p:nvSpPr>
-          <p:cNvPr id="12" name="텍스트"/>
+              <a:t>010-1234-5678      name@example.com</a:t>
+            </a:r>
+          </a:p>
+        </p:txBody>
+      </p:sp>
+      <p:sp>
+        <p:nvSpPr>
+          <p:cNvPr id="7" name="텍스트"/>
           <p:cNvSpPr txBox="1"/>
           <p:nvPr/>
         </p:nvSpPr>
         <p:spPr>
           <a:xfrm>
-            <a:off x="230400" y="1015200"/>
-            <a:ext cx="122400" cy="168911"/>
+            <a:off x="360000" y="1425600"/>
+            <a:ext cx="2520000" cy="133351"/>
           </a:xfrm>
           <a:prstGeom prst="rect">
             <a:avLst/>
@@ -3442,34 +3297,34 @@
           </a:bodyPr>
           <a:lstStyle/>
           <a:p>
-            <a:pPr algn="l">
+            <a:pPr algn="ctr">
               <a:lnSpc>
                 <a:spcPts val="1015"/>
               </a:lnSpc>
             </a:pPr>
             <a:r>
-              <a:rPr sz="700" b="1">
+              <a:rPr sz="700" b="0">
                 <a:solidFill>
-                  <a:srgbClr val="B2526A"/>
+                  <a:srgbClr val="6B7280"/>
                 </a:solidFill>
                 <a:latin typeface="맑은 고딕"/>
                 <a:ea typeface="맑은 고딕"/>
               </a:rPr>
-              <a:t>T</a:t>
-            </a:r>
-          </a:p>
-        </p:txBody>
-      </p:sp>
-      <p:sp>
-        <p:nvSpPr>
-          <p:cNvPr id="13" name="텍스트"/>
+              <a:t>주소를 입력해 주세요</a:t>
+            </a:r>
+          </a:p>
+        </p:txBody>
+      </p:sp>
+      <p:sp>
+        <p:nvSpPr>
+          <p:cNvPr id="8" name="텍스트"/>
           <p:cNvSpPr txBox="1"/>
           <p:nvPr/>
         </p:nvSpPr>
         <p:spPr>
           <a:xfrm>
-            <a:off x="374400" y="1015200"/>
-            <a:ext cx="1872000" cy="168911"/>
+            <a:off x="360000" y="1576800"/>
+            <a:ext cx="2520000" cy="104776"/>
           </a:xfrm>
           <a:prstGeom prst="rect">
             <a:avLst/>
@@ -3482,180 +3337,20 @@
           </a:bodyPr>
           <a:lstStyle/>
           <a:p>
-            <a:pPr algn="l">
+            <a:pPr algn="ctr">
               <a:lnSpc>
-                <a:spcPts val="1015"/>
+                <a:spcPts val="797"/>
               </a:lnSpc>
             </a:pPr>
             <a:r>
-              <a:rPr sz="700" b="0">
+              <a:rPr sz="550" b="1" spc="300">
                 <a:solidFill>
-                  <a:srgbClr val="9E2E4A"/>
+                  <a:srgbClr val="6B7280"/>
                 </a:solidFill>
                 <a:latin typeface="맑은 고딕"/>
                 <a:ea typeface="맑은 고딕"/>
               </a:rPr>
-              <a:t>010-1234-5678</a:t>
-            </a:r>
-          </a:p>
-        </p:txBody>
-      </p:sp>
-      <p:sp>
-        <p:nvSpPr>
-          <p:cNvPr id="14" name="텍스트"/>
-          <p:cNvSpPr txBox="1"/>
-          <p:nvPr/>
-        </p:nvSpPr>
-        <p:spPr>
-          <a:xfrm>
-            <a:off x="230400" y="1184111"/>
-            <a:ext cx="122400" cy="168911"/>
-          </a:xfrm>
-          <a:prstGeom prst="rect">
-            <a:avLst/>
-          </a:prstGeom>
-          <a:noFill/>
-        </p:spPr>
-        <p:txBody>
-          <a:bodyPr wrap="square" lIns="0" rIns="0" tIns="0" bIns="0" anchor="t">
-            <a:spAutoFit/>
-          </a:bodyPr>
-          <a:lstStyle/>
-          <a:p>
-            <a:pPr algn="l">
-              <a:lnSpc>
-                <a:spcPts val="1015"/>
-              </a:lnSpc>
-            </a:pPr>
-            <a:r>
-              <a:rPr sz="700" b="1">
-                <a:solidFill>
-                  <a:srgbClr val="B2526A"/>
-                </a:solidFill>
-                <a:latin typeface="맑은 고딕"/>
-                <a:ea typeface="맑은 고딕"/>
-              </a:rPr>
-              <a:t>E</a:t>
-            </a:r>
-          </a:p>
-        </p:txBody>
-      </p:sp>
-      <p:sp>
-        <p:nvSpPr>
-          <p:cNvPr id="15" name="텍스트"/>
-          <p:cNvSpPr txBox="1"/>
-          <p:nvPr/>
-        </p:nvSpPr>
-        <p:spPr>
-          <a:xfrm>
-            <a:off x="374400" y="1184111"/>
-            <a:ext cx="1872000" cy="168911"/>
-          </a:xfrm>
-          <a:prstGeom prst="rect">
-            <a:avLst/>
-          </a:prstGeom>
-          <a:noFill/>
-        </p:spPr>
-        <p:txBody>
-          <a:bodyPr wrap="square" lIns="0" rIns="0" tIns="0" bIns="0" anchor="t">
-            <a:spAutoFit/>
-          </a:bodyPr>
-          <a:lstStyle/>
-          <a:p>
-            <a:pPr algn="l">
-              <a:lnSpc>
-                <a:spcPts val="1015"/>
-              </a:lnSpc>
-            </a:pPr>
-            <a:r>
-              <a:rPr sz="700" b="0">
-                <a:solidFill>
-                  <a:srgbClr val="9E2E4A"/>
-                </a:solidFill>
-                <a:latin typeface="맑은 고딕"/>
-                <a:ea typeface="맑은 고딕"/>
-              </a:rPr>
-              <a:t>name@example.com</a:t>
-            </a:r>
-          </a:p>
-        </p:txBody>
-      </p:sp>
-      <p:sp>
-        <p:nvSpPr>
-          <p:cNvPr id="16" name="텍스트"/>
-          <p:cNvSpPr txBox="1"/>
-          <p:nvPr/>
-        </p:nvSpPr>
-        <p:spPr>
-          <a:xfrm>
-            <a:off x="230400" y="1353022"/>
-            <a:ext cx="122400" cy="168911"/>
-          </a:xfrm>
-          <a:prstGeom prst="rect">
-            <a:avLst/>
-          </a:prstGeom>
-          <a:noFill/>
-        </p:spPr>
-        <p:txBody>
-          <a:bodyPr wrap="square" lIns="0" rIns="0" tIns="0" bIns="0" anchor="t">
-            <a:spAutoFit/>
-          </a:bodyPr>
-          <a:lstStyle/>
-          <a:p>
-            <a:pPr algn="l">
-              <a:lnSpc>
-                <a:spcPts val="1015"/>
-              </a:lnSpc>
-            </a:pPr>
-            <a:r>
-              <a:rPr sz="700" b="1">
-                <a:solidFill>
-                  <a:srgbClr val="B2526A"/>
-                </a:solidFill>
-                <a:latin typeface="맑은 고딕"/>
-                <a:ea typeface="맑은 고딕"/>
-              </a:rPr>
-              <a:t>A</a:t>
-            </a:r>
-          </a:p>
-        </p:txBody>
-      </p:sp>
-      <p:sp>
-        <p:nvSpPr>
-          <p:cNvPr id="17" name="텍스트"/>
-          <p:cNvSpPr txBox="1"/>
-          <p:nvPr/>
-        </p:nvSpPr>
-        <p:spPr>
-          <a:xfrm>
-            <a:off x="374400" y="1353022"/>
-            <a:ext cx="1872000" cy="168911"/>
-          </a:xfrm>
-          <a:prstGeom prst="rect">
-            <a:avLst/>
-          </a:prstGeom>
-          <a:noFill/>
-        </p:spPr>
-        <p:txBody>
-          <a:bodyPr wrap="square" lIns="0" rIns="0" tIns="0" bIns="0" anchor="t">
-            <a:spAutoFit/>
-          </a:bodyPr>
-          <a:lstStyle/>
-          <a:p>
-            <a:pPr algn="l">
-              <a:lnSpc>
-                <a:spcPts val="1015"/>
-              </a:lnSpc>
-            </a:pPr>
-            <a:r>
-              <a:rPr sz="700" b="0">
-                <a:solidFill>
-                  <a:srgbClr val="9E2E4A"/>
-                </a:solidFill>
-                <a:latin typeface="맑은 고딕"/>
-                <a:ea typeface="맑은 고딕"/>
-              </a:rPr>
-              <a:t>주소를 입력해 주세요</a:t>
+              <a:t>회사명 · 부서명</a:t>
             </a:r>
           </a:p>
         </p:txBody>
@@ -3674,7 +3369,7 @@
     <p:bg>
       <p:bgPr>
         <a:solidFill>
-          <a:srgbClr val="9E2E4A"/>
+          <a:srgbClr val="2E9BFF"/>
         </a:solidFill>
         <a:effectLst/>
       </p:bgPr>
@@ -3694,14 +3389,14 @@
         </p:nvSpPr>
         <p:spPr>
           <a:xfrm>
-            <a:off x="0" y="0"/>
-            <a:ext cx="1224000" cy="1800000"/>
+            <a:off x="252000" y="540000"/>
+            <a:ext cx="28800" cy="720000"/>
           </a:xfrm>
           <a:prstGeom prst="rect">
             <a:avLst/>
           </a:prstGeom>
           <a:solidFill>
-            <a:srgbClr val="DE8DA1"/>
+            <a:srgbClr val="12151C"/>
           </a:solidFill>
           <a:ln>
             <a:noFill/>
@@ -3717,188 +3412,14 @@
       </p:sp>
       <p:sp>
         <p:nvSpPr>
-          <p:cNvPr id="3" name="Rectangle 2"/>
-          <p:cNvSpPr/>
+          <p:cNvPr id="3" name="텍스트"/>
+          <p:cNvSpPr txBox="1"/>
           <p:nvPr/>
         </p:nvSpPr>
         <p:spPr>
           <a:xfrm>
-            <a:off x="568800" y="651600"/>
-            <a:ext cx="86400" cy="496800"/>
-          </a:xfrm>
-          <a:prstGeom prst="rect">
-            <a:avLst/>
-          </a:prstGeom>
-          <a:solidFill>
-            <a:srgbClr val="FFFFFF"/>
-          </a:solidFill>
-          <a:ln>
-            <a:noFill/>
-          </a:ln>
-        </p:spPr>
-        <p:txBody>
-          <a:bodyPr rtlCol="0" anchor="ctr"/>
-          <a:lstStyle/>
-          <a:p>
-            <a:pPr algn="ctr"/>
-          </a:p>
-        </p:txBody>
-      </p:sp>
-      <p:sp>
-        <p:nvSpPr>
-          <p:cNvPr id="4" name="Rectangle 3"/>
-          <p:cNvSpPr/>
-          <p:nvPr/>
-        </p:nvSpPr>
-        <p:spPr>
-          <a:xfrm rot="2700000">
-            <a:off x="568800" y="651600"/>
-            <a:ext cx="86400" cy="496800"/>
-          </a:xfrm>
-          <a:prstGeom prst="rect">
-            <a:avLst/>
-          </a:prstGeom>
-          <a:solidFill>
-            <a:srgbClr val="FFFFFF"/>
-          </a:solidFill>
-          <a:ln>
-            <a:noFill/>
-          </a:ln>
-        </p:spPr>
-        <p:txBody>
-          <a:bodyPr rtlCol="0" anchor="ctr"/>
-          <a:lstStyle/>
-          <a:p>
-            <a:pPr algn="ctr"/>
-          </a:p>
-        </p:txBody>
-      </p:sp>
-      <p:sp>
-        <p:nvSpPr>
-          <p:cNvPr id="5" name="Rectangle 4"/>
-          <p:cNvSpPr/>
-          <p:nvPr/>
-        </p:nvSpPr>
-        <p:spPr>
-          <a:xfrm rot="5400000">
-            <a:off x="568800" y="651600"/>
-            <a:ext cx="86400" cy="496800"/>
-          </a:xfrm>
-          <a:prstGeom prst="rect">
-            <a:avLst/>
-          </a:prstGeom>
-          <a:solidFill>
-            <a:srgbClr val="FFFFFF"/>
-          </a:solidFill>
-          <a:ln>
-            <a:noFill/>
-          </a:ln>
-        </p:spPr>
-        <p:txBody>
-          <a:bodyPr rtlCol="0" anchor="ctr"/>
-          <a:lstStyle/>
-          <a:p>
-            <a:pPr algn="ctr"/>
-          </a:p>
-        </p:txBody>
-      </p:sp>
-      <p:sp>
-        <p:nvSpPr>
-          <p:cNvPr id="6" name="Rectangle 5"/>
-          <p:cNvSpPr/>
-          <p:nvPr/>
-        </p:nvSpPr>
-        <p:spPr>
-          <a:xfrm rot="8100000">
-            <a:off x="568800" y="651600"/>
-            <a:ext cx="86400" cy="496800"/>
-          </a:xfrm>
-          <a:prstGeom prst="rect">
-            <a:avLst/>
-          </a:prstGeom>
-          <a:solidFill>
-            <a:srgbClr val="FFFFFF"/>
-          </a:solidFill>
-          <a:ln>
-            <a:noFill/>
-          </a:ln>
-        </p:spPr>
-        <p:txBody>
-          <a:bodyPr rtlCol="0" anchor="ctr"/>
-          <a:lstStyle/>
-          <a:p>
-            <a:pPr algn="ctr"/>
-          </a:p>
-        </p:txBody>
-      </p:sp>
-      <p:sp>
-        <p:nvSpPr>
-          <p:cNvPr id="7" name="Oval 6"/>
-          <p:cNvSpPr/>
-          <p:nvPr/>
-        </p:nvSpPr>
-        <p:spPr>
-          <a:xfrm>
-            <a:off x="460800" y="748800"/>
-            <a:ext cx="302400" cy="302400"/>
-          </a:xfrm>
-          <a:prstGeom prst="ellipse">
-            <a:avLst/>
-          </a:prstGeom>
-          <a:solidFill>
-            <a:srgbClr val="FFFFFF"/>
-          </a:solidFill>
-          <a:ln>
-            <a:noFill/>
-          </a:ln>
-        </p:spPr>
-        <p:txBody>
-          <a:bodyPr rtlCol="0" anchor="ctr"/>
-          <a:lstStyle/>
-          <a:p>
-            <a:pPr algn="ctr"/>
-          </a:p>
-        </p:txBody>
-      </p:sp>
-      <p:sp>
-        <p:nvSpPr>
-          <p:cNvPr id="8" name="Oval 7"/>
-          <p:cNvSpPr/>
-          <p:nvPr/>
-        </p:nvSpPr>
-        <p:spPr>
-          <a:xfrm>
-            <a:off x="547200" y="835200"/>
-            <a:ext cx="129600" cy="129600"/>
-          </a:xfrm>
-          <a:prstGeom prst="ellipse">
-            <a:avLst/>
-          </a:prstGeom>
-          <a:solidFill>
-            <a:srgbClr val="FFFFFF"/>
-          </a:solidFill>
-          <a:ln>
-            <a:noFill/>
-          </a:ln>
-        </p:spPr>
-        <p:txBody>
-          <a:bodyPr rtlCol="0" anchor="ctr"/>
-          <a:lstStyle/>
-          <a:p>
-            <a:pPr algn="ctr"/>
-          </a:p>
-        </p:txBody>
-      </p:sp>
-      <p:sp>
-        <p:nvSpPr>
-          <p:cNvPr id="9" name="텍스트"/>
-          <p:cNvSpPr txBox="1"/>
-          <p:nvPr/>
-        </p:nvSpPr>
-        <p:spPr>
-          <a:xfrm>
-            <a:off x="1440000" y="432000"/>
-            <a:ext cx="1584000" cy="792000"/>
+            <a:off x="424800" y="612000"/>
+            <a:ext cx="2160000" cy="648000"/>
           </a:xfrm>
           <a:prstGeom prst="rect">
             <a:avLst/>
@@ -3906,20 +3427,20 @@
           <a:noFill/>
         </p:spPr>
         <p:txBody>
-          <a:bodyPr wrap="square" lIns="0" rIns="0" tIns="0" bIns="0" anchor="ctr">
+          <a:bodyPr wrap="square" lIns="0" rIns="0" tIns="0" bIns="0" anchor="t">
             <a:spAutoFit/>
           </a:bodyPr>
           <a:lstStyle/>
           <a:p>
             <a:pPr algn="l">
               <a:lnSpc>
-                <a:spcPts val="1667"/>
+                <a:spcPts val="1812"/>
               </a:lnSpc>
             </a:pPr>
             <a:r>
-              <a:rPr sz="1150" b="1">
+              <a:rPr sz="1250" b="1">
                 <a:solidFill>
-                  <a:srgbClr val="FFFFFF"/>
+                  <a:srgbClr val="12151C"/>
                 </a:solidFill>
                 <a:latin typeface="맑은 고딕"/>
                 <a:ea typeface="맑은 고딕"/>
@@ -3930,13 +3451,13 @@
           <a:p>
             <a:pPr algn="l">
               <a:lnSpc>
-                <a:spcPts val="1667"/>
+                <a:spcPts val="1812"/>
               </a:lnSpc>
             </a:pPr>
             <a:r>
-              <a:rPr sz="1150" b="1">
+              <a:rPr sz="1250" b="1">
                 <a:solidFill>
-                  <a:srgbClr val="FFFFFF"/>
+                  <a:srgbClr val="12151C"/>
                 </a:solidFill>
                 <a:latin typeface="맑은 고딕"/>
                 <a:ea typeface="맑은 고딕"/>
@@ -3948,43 +3469,14 @@
       </p:sp>
       <p:sp>
         <p:nvSpPr>
-          <p:cNvPr id="10" name="Rectangle 9"/>
-          <p:cNvSpPr/>
+          <p:cNvPr id="4" name="텍스트"/>
+          <p:cNvSpPr txBox="1"/>
           <p:nvPr/>
         </p:nvSpPr>
         <p:spPr>
           <a:xfrm>
-            <a:off x="1440000" y="1317600"/>
-            <a:ext cx="180000" cy="10800"/>
-          </a:xfrm>
-          <a:prstGeom prst="rect">
-            <a:avLst/>
-          </a:prstGeom>
-          <a:solidFill>
-            <a:srgbClr val="DE8DA1"/>
-          </a:solidFill>
-          <a:ln>
-            <a:noFill/>
-          </a:ln>
-        </p:spPr>
-        <p:txBody>
-          <a:bodyPr rtlCol="0" anchor="ctr"/>
-          <a:lstStyle/>
-          <a:p>
-            <a:pPr algn="ctr"/>
-          </a:p>
-        </p:txBody>
-      </p:sp>
-      <p:sp>
-        <p:nvSpPr>
-          <p:cNvPr id="11" name="텍스트"/>
-          <p:cNvSpPr txBox="1"/>
-          <p:nvPr/>
-        </p:nvSpPr>
-        <p:spPr>
-          <a:xfrm>
-            <a:off x="1440000" y="1418400"/>
-            <a:ext cx="1584000" cy="108000"/>
+            <a:off x="424800" y="1512000"/>
+            <a:ext cx="1800000" cy="123826"/>
           </a:xfrm>
           <a:prstGeom prst="rect">
             <a:avLst/>
@@ -3999,13 +3491,13 @@
           <a:p>
             <a:pPr algn="l">
               <a:lnSpc>
-                <a:spcPts val="1087"/>
+                <a:spcPts val="942"/>
               </a:lnSpc>
             </a:pPr>
             <a:r>
-              <a:rPr sz="750" b="1" spc="200">
+              <a:rPr sz="650" b="1" spc="200">
                 <a:solidFill>
-                  <a:srgbClr val="E6C8D0"/>
+                  <a:srgbClr val="18324E"/>
                 </a:solidFill>
                 <a:latin typeface="맑은 고딕"/>
                 <a:ea typeface="맑은 고딕"/>

--- a/public/fun/cards/office/office-03.pptx
+++ b/public/fun/cards/office/office-03.pptx
@@ -3097,25 +3097,193 @@
         <p:nvPr/>
       </p:nvGrpSpPr>
       <p:grpSpPr/>
-      <p:sp>
-        <p:nvSpPr>
-          <p:cNvPr id="2" name="Oval 1"/>
+      <p:cxnSp>
+        <p:nvCxnSpPr>
+          <p:cNvPr id="2" name="Connector 1"/>
+          <p:cNvCxnSpPr/>
+          <p:nvPr/>
+        </p:nvCxnSpPr>
+        <p:spPr>
+          <a:xfrm>
+            <a:off x="93600" y="122400"/>
+            <a:ext cx="57600" cy="0"/>
+          </a:xfrm>
+          <a:prstGeom prst="line">
+            <a:avLst/>
+          </a:prstGeom>
+          <a:ln w="3600">
+            <a:solidFill>
+              <a:srgbClr val="E3E5E9"/>
+            </a:solidFill>
+          </a:ln>
+        </p:spPr>
+      </p:cxnSp>
+      <p:cxnSp>
+        <p:nvCxnSpPr>
+          <p:cNvPr id="3" name="Connector 2"/>
+          <p:cNvCxnSpPr/>
+          <p:nvPr/>
+        </p:nvCxnSpPr>
+        <p:spPr>
+          <a:xfrm>
+            <a:off x="122400" y="93600"/>
+            <a:ext cx="0" cy="57600"/>
+          </a:xfrm>
+          <a:prstGeom prst="line">
+            <a:avLst/>
+          </a:prstGeom>
+          <a:ln w="3600">
+            <a:solidFill>
+              <a:srgbClr val="E3E5E9"/>
+            </a:solidFill>
+          </a:ln>
+        </p:spPr>
+      </p:cxnSp>
+      <p:cxnSp>
+        <p:nvCxnSpPr>
+          <p:cNvPr id="4" name="Connector 3"/>
+          <p:cNvCxnSpPr/>
+          <p:nvPr/>
+        </p:nvCxnSpPr>
+        <p:spPr>
+          <a:xfrm>
+            <a:off x="3088800" y="122400"/>
+            <a:ext cx="57600" cy="0"/>
+          </a:xfrm>
+          <a:prstGeom prst="line">
+            <a:avLst/>
+          </a:prstGeom>
+          <a:ln w="3600">
+            <a:solidFill>
+              <a:srgbClr val="E3E5E9"/>
+            </a:solidFill>
+          </a:ln>
+        </p:spPr>
+      </p:cxnSp>
+      <p:cxnSp>
+        <p:nvCxnSpPr>
+          <p:cNvPr id="5" name="Connector 4"/>
+          <p:cNvCxnSpPr/>
+          <p:nvPr/>
+        </p:nvCxnSpPr>
+        <p:spPr>
+          <a:xfrm>
+            <a:off x="3117600" y="93600"/>
+            <a:ext cx="0" cy="57600"/>
+          </a:xfrm>
+          <a:prstGeom prst="line">
+            <a:avLst/>
+          </a:prstGeom>
+          <a:ln w="3600">
+            <a:solidFill>
+              <a:srgbClr val="E3E5E9"/>
+            </a:solidFill>
+          </a:ln>
+        </p:spPr>
+      </p:cxnSp>
+      <p:cxnSp>
+        <p:nvCxnSpPr>
+          <p:cNvPr id="6" name="Connector 5"/>
+          <p:cNvCxnSpPr/>
+          <p:nvPr/>
+        </p:nvCxnSpPr>
+        <p:spPr>
+          <a:xfrm>
+            <a:off x="93600" y="1677600"/>
+            <a:ext cx="57600" cy="0"/>
+          </a:xfrm>
+          <a:prstGeom prst="line">
+            <a:avLst/>
+          </a:prstGeom>
+          <a:ln w="3600">
+            <a:solidFill>
+              <a:srgbClr val="E3E5E9"/>
+            </a:solidFill>
+          </a:ln>
+        </p:spPr>
+      </p:cxnSp>
+      <p:cxnSp>
+        <p:nvCxnSpPr>
+          <p:cNvPr id="7" name="Connector 6"/>
+          <p:cNvCxnSpPr/>
+          <p:nvPr/>
+        </p:nvCxnSpPr>
+        <p:spPr>
+          <a:xfrm>
+            <a:off x="122400" y="1648800"/>
+            <a:ext cx="0" cy="57600"/>
+          </a:xfrm>
+          <a:prstGeom prst="line">
+            <a:avLst/>
+          </a:prstGeom>
+          <a:ln w="3600">
+            <a:solidFill>
+              <a:srgbClr val="E3E5E9"/>
+            </a:solidFill>
+          </a:ln>
+        </p:spPr>
+      </p:cxnSp>
+      <p:cxnSp>
+        <p:nvCxnSpPr>
+          <p:cNvPr id="8" name="Connector 7"/>
+          <p:cNvCxnSpPr/>
+          <p:nvPr/>
+        </p:nvCxnSpPr>
+        <p:spPr>
+          <a:xfrm>
+            <a:off x="3088800" y="1677600"/>
+            <a:ext cx="57600" cy="0"/>
+          </a:xfrm>
+          <a:prstGeom prst="line">
+            <a:avLst/>
+          </a:prstGeom>
+          <a:ln w="3600">
+            <a:solidFill>
+              <a:srgbClr val="E3E5E9"/>
+            </a:solidFill>
+          </a:ln>
+        </p:spPr>
+      </p:cxnSp>
+      <p:cxnSp>
+        <p:nvCxnSpPr>
+          <p:cNvPr id="9" name="Connector 8"/>
+          <p:cNvCxnSpPr/>
+          <p:nvPr/>
+        </p:nvCxnSpPr>
+        <p:spPr>
+          <a:xfrm>
+            <a:off x="3117600" y="1648800"/>
+            <a:ext cx="0" cy="57600"/>
+          </a:xfrm>
+          <a:prstGeom prst="line">
+            <a:avLst/>
+          </a:prstGeom>
+          <a:ln w="3600">
+            <a:solidFill>
+              <a:srgbClr val="E3E5E9"/>
+            </a:solidFill>
+          </a:ln>
+        </p:spPr>
+      </p:cxnSp>
+      <p:sp>
+        <p:nvSpPr>
+          <p:cNvPr id="10" name="Oval 9"/>
           <p:cNvSpPr/>
           <p:nvPr/>
         </p:nvSpPr>
         <p:spPr>
           <a:xfrm>
-            <a:off x="1591200" y="208800"/>
-            <a:ext cx="57600" cy="57600"/>
+            <a:off x="1526400" y="237600"/>
+            <a:ext cx="187200" cy="187200"/>
           </a:xfrm>
           <a:prstGeom prst="ellipse">
             <a:avLst/>
           </a:prstGeom>
-          <a:solidFill>
-            <a:srgbClr val="2E9BFF"/>
-          </a:solidFill>
-          <a:ln>
-            <a:noFill/>
+          <a:noFill/>
+          <a:ln w="5040">
+            <a:solidFill>
+              <a:srgbClr val="2E9BFF"/>
+            </a:solidFill>
           </a:ln>
         </p:spPr>
         <p:txBody>
@@ -3128,14 +3296,14 @@
       </p:sp>
       <p:sp>
         <p:nvSpPr>
-          <p:cNvPr id="3" name="텍스트"/>
+          <p:cNvPr id="11" name="텍스트"/>
           <p:cNvSpPr txBox="1"/>
           <p:nvPr/>
         </p:nvSpPr>
         <p:spPr>
           <a:xfrm>
-            <a:off x="360000" y="468000"/>
-            <a:ext cx="2520000" cy="360000"/>
+            <a:off x="1476000" y="237600"/>
+            <a:ext cx="288000" cy="187200"/>
           </a:xfrm>
           <a:prstGeom prst="rect">
             <a:avLst/>
@@ -3143,6 +3311,46 @@
           <a:noFill/>
         </p:spPr>
         <p:txBody>
+          <a:bodyPr wrap="square" lIns="0" rIns="0" tIns="0" bIns="0" anchor="ctr">
+            <a:spAutoFit/>
+          </a:bodyPr>
+          <a:lstStyle/>
+          <a:p>
+            <a:pPr algn="ctr">
+              <a:lnSpc>
+                <a:spcPts val="1305"/>
+              </a:lnSpc>
+            </a:pPr>
+            <a:r>
+              <a:rPr sz="900" b="1">
+                <a:solidFill>
+                  <a:srgbClr val="2E9BFF"/>
+                </a:solidFill>
+                <a:latin typeface="맑은 고딕"/>
+                <a:ea typeface="맑은 고딕"/>
+              </a:rPr>
+              <a:t>회</a:t>
+            </a:r>
+          </a:p>
+        </p:txBody>
+      </p:sp>
+      <p:sp>
+        <p:nvSpPr>
+          <p:cNvPr id="12" name="텍스트"/>
+          <p:cNvSpPr txBox="1"/>
+          <p:nvPr/>
+        </p:nvSpPr>
+        <p:spPr>
+          <a:xfrm>
+            <a:off x="360000" y="540000"/>
+            <a:ext cx="2520000" cy="237600"/>
+          </a:xfrm>
+          <a:prstGeom prst="rect">
+            <a:avLst/>
+          </a:prstGeom>
+          <a:noFill/>
+        </p:spPr>
+        <p:txBody>
           <a:bodyPr wrap="square" lIns="0" rIns="0" tIns="0" bIns="0" anchor="t">
             <a:spAutoFit/>
           </a:bodyPr>
@@ -3150,11 +3358,11 @@
           <a:p>
             <a:pPr algn="ctr">
               <a:lnSpc>
-                <a:spcPts val="3190"/>
+                <a:spcPts val="1957"/>
               </a:lnSpc>
             </a:pPr>
             <a:r>
-              <a:rPr sz="2200" b="1">
+              <a:rPr sz="1350" b="1" spc="120">
                 <a:solidFill>
                   <a:srgbClr val="12151C"/>
                 </a:solidFill>
@@ -3168,14 +3376,14 @@
       </p:sp>
       <p:sp>
         <p:nvSpPr>
-          <p:cNvPr id="4" name="텍스트"/>
+          <p:cNvPr id="13" name="텍스트"/>
           <p:cNvSpPr txBox="1"/>
           <p:nvPr/>
         </p:nvSpPr>
         <p:spPr>
           <a:xfrm>
-            <a:off x="360000" y="878400"/>
-            <a:ext cx="2520000" cy="171451"/>
+            <a:off x="360000" y="792000"/>
+            <a:ext cx="2520000" cy="133351"/>
           </a:xfrm>
           <a:prstGeom prst="rect">
             <a:avLst/>
@@ -3190,11 +3398,11 @@
           <a:p>
             <a:pPr algn="ctr">
               <a:lnSpc>
-                <a:spcPts val="1305"/>
+                <a:spcPts val="1015"/>
               </a:lnSpc>
             </a:pPr>
             <a:r>
-              <a:rPr sz="900" b="0">
+              <a:rPr sz="700" b="0" spc="60">
                 <a:solidFill>
                   <a:srgbClr val="6B7280"/>
                 </a:solidFill>
@@ -3206,45 +3414,37 @@
           </a:p>
         </p:txBody>
       </p:sp>
-      <p:sp>
-        <p:nvSpPr>
-          <p:cNvPr id="5" name="Rectangle 4"/>
-          <p:cNvSpPr/>
+      <p:cxnSp>
+        <p:nvCxnSpPr>
+          <p:cNvPr id="14" name="Connector 13"/>
+          <p:cNvCxnSpPr/>
           <p:nvPr/>
-        </p:nvSpPr>
-        <p:spPr>
-          <a:xfrm>
-            <a:off x="1530000" y="1137600"/>
-            <a:ext cx="180000" cy="14400"/>
-          </a:xfrm>
-          <a:prstGeom prst="rect">
+        </p:nvCxnSpPr>
+        <p:spPr>
+          <a:xfrm>
+            <a:off x="1440000" y="1015200"/>
+            <a:ext cx="360000" cy="0"/>
+          </a:xfrm>
+          <a:prstGeom prst="line">
             <a:avLst/>
           </a:prstGeom>
-          <a:solidFill>
-            <a:srgbClr val="2E9BFF"/>
-          </a:solidFill>
-          <a:ln>
-            <a:noFill/>
+          <a:ln w="7920">
+            <a:solidFill>
+              <a:srgbClr val="2E9BFF"/>
+            </a:solidFill>
           </a:ln>
         </p:spPr>
-        <p:txBody>
-          <a:bodyPr rtlCol="0" anchor="ctr"/>
-          <a:lstStyle/>
-          <a:p>
-            <a:pPr algn="ctr"/>
-          </a:p>
-        </p:txBody>
-      </p:sp>
-      <p:sp>
-        <p:nvSpPr>
-          <p:cNvPr id="6" name="텍스트"/>
+      </p:cxnSp>
+      <p:sp>
+        <p:nvSpPr>
+          <p:cNvPr id="15" name="텍스트"/>
           <p:cNvSpPr txBox="1"/>
           <p:nvPr/>
         </p:nvSpPr>
         <p:spPr>
           <a:xfrm>
-            <a:off x="360000" y="1267200"/>
-            <a:ext cx="2520000" cy="133351"/>
+            <a:off x="360000" y="1101600"/>
+            <a:ext cx="2520000" cy="123826"/>
           </a:xfrm>
           <a:prstGeom prst="rect">
             <a:avLst/>
@@ -3259,32 +3459,72 @@
           <a:p>
             <a:pPr algn="ctr">
               <a:lnSpc>
-                <a:spcPts val="1015"/>
+                <a:spcPts val="942"/>
               </a:lnSpc>
             </a:pPr>
             <a:r>
-              <a:rPr sz="700" b="0">
+              <a:rPr sz="650" b="1" spc="220">
+                <a:solidFill>
+                  <a:srgbClr val="6B7280"/>
+                </a:solidFill>
+                <a:latin typeface="맑은 고딕"/>
+                <a:ea typeface="맑은 고딕"/>
+              </a:rPr>
+              <a:t>회사명 · 부서명</a:t>
+            </a:r>
+          </a:p>
+        </p:txBody>
+      </p:sp>
+      <p:sp>
+        <p:nvSpPr>
+          <p:cNvPr id="16" name="텍스트"/>
+          <p:cNvSpPr txBox="1"/>
+          <p:nvPr/>
+        </p:nvSpPr>
+        <p:spPr>
+          <a:xfrm>
+            <a:off x="360000" y="1339200"/>
+            <a:ext cx="2520000" cy="123826"/>
+          </a:xfrm>
+          <a:prstGeom prst="rect">
+            <a:avLst/>
+          </a:prstGeom>
+          <a:noFill/>
+        </p:spPr>
+        <p:txBody>
+          <a:bodyPr wrap="square" lIns="0" rIns="0" tIns="0" bIns="0" anchor="t">
+            <a:spAutoFit/>
+          </a:bodyPr>
+          <a:lstStyle/>
+          <a:p>
+            <a:pPr algn="ctr">
+              <a:lnSpc>
+                <a:spcPts val="942"/>
+              </a:lnSpc>
+            </a:pPr>
+            <a:r>
+              <a:rPr sz="650" b="0">
                 <a:solidFill>
                   <a:srgbClr val="12151C"/>
                 </a:solidFill>
                 <a:latin typeface="맑은 고딕"/>
                 <a:ea typeface="맑은 고딕"/>
               </a:rPr>
-              <a:t>010-1234-5678      name@example.com</a:t>
-            </a:r>
-          </a:p>
-        </p:txBody>
-      </p:sp>
-      <p:sp>
-        <p:nvSpPr>
-          <p:cNvPr id="7" name="텍스트"/>
+              <a:t>010-1234-5678     |     name@example.com</a:t>
+            </a:r>
+          </a:p>
+        </p:txBody>
+      </p:sp>
+      <p:sp>
+        <p:nvSpPr>
+          <p:cNvPr id="17" name="텍스트"/>
           <p:cNvSpPr txBox="1"/>
           <p:nvPr/>
         </p:nvSpPr>
         <p:spPr>
           <a:xfrm>
-            <a:off x="360000" y="1425600"/>
-            <a:ext cx="2520000" cy="133351"/>
+            <a:off x="360000" y="1476000"/>
+            <a:ext cx="2520000" cy="123826"/>
           </a:xfrm>
           <a:prstGeom prst="rect">
             <a:avLst/>
@@ -3299,11 +3539,11 @@
           <a:p>
             <a:pPr algn="ctr">
               <a:lnSpc>
-                <a:spcPts val="1015"/>
+                <a:spcPts val="942"/>
               </a:lnSpc>
             </a:pPr>
             <a:r>
-              <a:rPr sz="700" b="0">
+              <a:rPr sz="650" b="0">
                 <a:solidFill>
                   <a:srgbClr val="6B7280"/>
                 </a:solidFill>
@@ -3311,46 +3551,6 @@
                 <a:ea typeface="맑은 고딕"/>
               </a:rPr>
               <a:t>주소를 입력해 주세요</a:t>
-            </a:r>
-          </a:p>
-        </p:txBody>
-      </p:sp>
-      <p:sp>
-        <p:nvSpPr>
-          <p:cNvPr id="8" name="텍스트"/>
-          <p:cNvSpPr txBox="1"/>
-          <p:nvPr/>
-        </p:nvSpPr>
-        <p:spPr>
-          <a:xfrm>
-            <a:off x="360000" y="1576800"/>
-            <a:ext cx="2520000" cy="104776"/>
-          </a:xfrm>
-          <a:prstGeom prst="rect">
-            <a:avLst/>
-          </a:prstGeom>
-          <a:noFill/>
-        </p:spPr>
-        <p:txBody>
-          <a:bodyPr wrap="square" lIns="0" rIns="0" tIns="0" bIns="0" anchor="t">
-            <a:spAutoFit/>
-          </a:bodyPr>
-          <a:lstStyle/>
-          <a:p>
-            <a:pPr algn="ctr">
-              <a:lnSpc>
-                <a:spcPts val="797"/>
-              </a:lnSpc>
-            </a:pPr>
-            <a:r>
-              <a:rPr sz="550" b="1" spc="300">
-                <a:solidFill>
-                  <a:srgbClr val="6B7280"/>
-                </a:solidFill>
-                <a:latin typeface="맑은 고딕"/>
-                <a:ea typeface="맑은 고딕"/>
-              </a:rPr>
-              <a:t>회사명 · 부서명</a:t>
             </a:r>
           </a:p>
         </p:txBody>
@@ -3383,43 +3583,14 @@
       <p:grpSpPr/>
       <p:sp>
         <p:nvSpPr>
-          <p:cNvPr id="2" name="Rectangle 1"/>
-          <p:cNvSpPr/>
-          <p:nvPr/>
-        </p:nvSpPr>
-        <p:spPr>
-          <a:xfrm>
-            <a:off x="252000" y="540000"/>
-            <a:ext cx="28800" cy="720000"/>
-          </a:xfrm>
-          <a:prstGeom prst="rect">
-            <a:avLst/>
-          </a:prstGeom>
-          <a:solidFill>
-            <a:srgbClr val="12151C"/>
-          </a:solidFill>
-          <a:ln>
-            <a:noFill/>
-          </a:ln>
-        </p:spPr>
-        <p:txBody>
-          <a:bodyPr rtlCol="0" anchor="ctr"/>
-          <a:lstStyle/>
-          <a:p>
-            <a:pPr algn="ctr"/>
-          </a:p>
-        </p:txBody>
-      </p:sp>
-      <p:sp>
-        <p:nvSpPr>
-          <p:cNvPr id="3" name="텍스트"/>
+          <p:cNvPr id="2" name="텍스트"/>
           <p:cNvSpPr txBox="1"/>
           <p:nvPr/>
         </p:nvSpPr>
         <p:spPr>
           <a:xfrm>
-            <a:off x="424800" y="612000"/>
-            <a:ext cx="2160000" cy="648000"/>
+            <a:off x="252000" y="223200"/>
+            <a:ext cx="1080000" cy="99061"/>
           </a:xfrm>
           <a:prstGeom prst="rect">
             <a:avLst/>
@@ -3434,49 +3605,154 @@
           <a:p>
             <a:pPr algn="l">
               <a:lnSpc>
-                <a:spcPts val="1812"/>
+                <a:spcPts val="754"/>
               </a:lnSpc>
             </a:pPr>
             <a:r>
-              <a:rPr sz="1250" b="1">
+              <a:rPr sz="520" b="1" spc="240">
+                <a:solidFill>
+                  <a:srgbClr val="18324E"/>
+                </a:solidFill>
+                <a:latin typeface="맑은 고딕"/>
+                <a:ea typeface="맑은 고딕"/>
+              </a:rPr>
+              <a:t>담당 업무</a:t>
+            </a:r>
+          </a:p>
+        </p:txBody>
+      </p:sp>
+      <p:cxnSp>
+        <p:nvCxnSpPr>
+          <p:cNvPr id="3" name="Connector 2"/>
+          <p:cNvCxnSpPr/>
+          <p:nvPr/>
+        </p:nvCxnSpPr>
+        <p:spPr>
+          <a:xfrm>
+            <a:off x="252000" y="388800"/>
+            <a:ext cx="2736000" cy="0"/>
+          </a:xfrm>
+          <a:prstGeom prst="line">
+            <a:avLst/>
+          </a:prstGeom>
+          <a:ln w="3600">
+            <a:solidFill>
+              <a:srgbClr val="2365A4"/>
+            </a:solidFill>
+          </a:ln>
+        </p:spPr>
+      </p:cxnSp>
+      <p:sp>
+        <p:nvSpPr>
+          <p:cNvPr id="4" name="텍스트"/>
+          <p:cNvSpPr txBox="1"/>
+          <p:nvPr/>
+        </p:nvSpPr>
+        <p:spPr>
+          <a:xfrm>
+            <a:off x="252000" y="468000"/>
+            <a:ext cx="216000" cy="99061"/>
+          </a:xfrm>
+          <a:prstGeom prst="rect">
+            <a:avLst/>
+          </a:prstGeom>
+          <a:noFill/>
+        </p:spPr>
+        <p:txBody>
+          <a:bodyPr wrap="square" lIns="0" rIns="0" tIns="0" bIns="0" anchor="t">
+            <a:spAutoFit/>
+          </a:bodyPr>
+          <a:lstStyle/>
+          <a:p>
+            <a:pPr algn="l">
+              <a:lnSpc>
+                <a:spcPts val="754"/>
+              </a:lnSpc>
+            </a:pPr>
+            <a:r>
+              <a:rPr sz="520" b="1" spc="100">
                 <a:solidFill>
                   <a:srgbClr val="12151C"/>
                 </a:solidFill>
                 <a:latin typeface="맑은 고딕"/>
                 <a:ea typeface="맑은 고딕"/>
               </a:rPr>
-              <a:t>일은 정확하게,</a:t>
-            </a:r>
-          </a:p>
+              <a:t>01</a:t>
+            </a:r>
+          </a:p>
+        </p:txBody>
+      </p:sp>
+      <p:sp>
+        <p:nvSpPr>
+          <p:cNvPr id="5" name="텍스트"/>
+          <p:cNvSpPr txBox="1"/>
+          <p:nvPr/>
+        </p:nvSpPr>
+        <p:spPr>
+          <a:xfrm>
+            <a:off x="475200" y="457200"/>
+            <a:ext cx="1152000" cy="140971"/>
+          </a:xfrm>
+          <a:prstGeom prst="rect">
+            <a:avLst/>
+          </a:prstGeom>
+          <a:noFill/>
+        </p:spPr>
+        <p:txBody>
+          <a:bodyPr wrap="square" lIns="0" rIns="0" tIns="0" bIns="0" anchor="t">
+            <a:spAutoFit/>
+          </a:bodyPr>
+          <a:lstStyle/>
           <a:p>
             <a:pPr algn="l">
               <a:lnSpc>
-                <a:spcPts val="1812"/>
+                <a:spcPts val="1073"/>
               </a:lnSpc>
             </a:pPr>
             <a:r>
-              <a:rPr sz="1250" b="1">
+              <a:rPr sz="740" b="0">
                 <a:solidFill>
                   <a:srgbClr val="12151C"/>
                 </a:solidFill>
                 <a:latin typeface="맑은 고딕"/>
                 <a:ea typeface="맑은 고딕"/>
               </a:rPr>
-              <a:t>마음은 따뜻하게</a:t>
-            </a:r>
-          </a:p>
-        </p:txBody>
-      </p:sp>
-      <p:sp>
-        <p:nvSpPr>
-          <p:cNvPr id="4" name="텍스트"/>
+              <a:t>서비스 기획</a:t>
+            </a:r>
+          </a:p>
+        </p:txBody>
+      </p:sp>
+      <p:cxnSp>
+        <p:nvCxnSpPr>
+          <p:cNvPr id="6" name="Connector 5"/>
+          <p:cNvCxnSpPr/>
+          <p:nvPr/>
+        </p:nvCxnSpPr>
+        <p:spPr>
+          <a:xfrm>
+            <a:off x="252000" y="691200"/>
+            <a:ext cx="1296000" cy="0"/>
+          </a:xfrm>
+          <a:prstGeom prst="line">
+            <a:avLst/>
+          </a:prstGeom>
+          <a:ln w="3600">
+            <a:solidFill>
+              <a:srgbClr val="2365A4"/>
+            </a:solidFill>
+          </a:ln>
+        </p:spPr>
+      </p:cxnSp>
+      <p:sp>
+        <p:nvSpPr>
+          <p:cNvPr id="7" name="텍스트"/>
           <p:cNvSpPr txBox="1"/>
           <p:nvPr/>
         </p:nvSpPr>
         <p:spPr>
           <a:xfrm>
-            <a:off x="424800" y="1512000"/>
-            <a:ext cx="1800000" cy="123826"/>
+            <a:off x="1656000" y="468000"/>
+            <a:ext cx="216000" cy="99061"/>
           </a:xfrm>
           <a:prstGeom prst="rect">
             <a:avLst/>
@@ -3491,18 +3767,361 @@
           <a:p>
             <a:pPr algn="l">
               <a:lnSpc>
-                <a:spcPts val="942"/>
+                <a:spcPts val="754"/>
               </a:lnSpc>
             </a:pPr>
             <a:r>
-              <a:rPr sz="650" b="1" spc="200">
+              <a:rPr sz="520" b="1" spc="100">
+                <a:solidFill>
+                  <a:srgbClr val="12151C"/>
+                </a:solidFill>
+                <a:latin typeface="맑은 고딕"/>
+                <a:ea typeface="맑은 고딕"/>
+              </a:rPr>
+              <a:t>02</a:t>
+            </a:r>
+          </a:p>
+        </p:txBody>
+      </p:sp>
+      <p:sp>
+        <p:nvSpPr>
+          <p:cNvPr id="8" name="텍스트"/>
+          <p:cNvSpPr txBox="1"/>
+          <p:nvPr/>
+        </p:nvSpPr>
+        <p:spPr>
+          <a:xfrm>
+            <a:off x="1879200" y="457200"/>
+            <a:ext cx="1152000" cy="140971"/>
+          </a:xfrm>
+          <a:prstGeom prst="rect">
+            <a:avLst/>
+          </a:prstGeom>
+          <a:noFill/>
+        </p:spPr>
+        <p:txBody>
+          <a:bodyPr wrap="square" lIns="0" rIns="0" tIns="0" bIns="0" anchor="t">
+            <a:spAutoFit/>
+          </a:bodyPr>
+          <a:lstStyle/>
+          <a:p>
+            <a:pPr algn="l">
+              <a:lnSpc>
+                <a:spcPts val="1073"/>
+              </a:lnSpc>
+            </a:pPr>
+            <a:r>
+              <a:rPr sz="740" b="0">
+                <a:solidFill>
+                  <a:srgbClr val="12151C"/>
+                </a:solidFill>
+                <a:latin typeface="맑은 고딕"/>
+                <a:ea typeface="맑은 고딕"/>
+              </a:rPr>
+              <a:t>데이터 분석</a:t>
+            </a:r>
+          </a:p>
+        </p:txBody>
+      </p:sp>
+      <p:cxnSp>
+        <p:nvCxnSpPr>
+          <p:cNvPr id="9" name="Connector 8"/>
+          <p:cNvCxnSpPr/>
+          <p:nvPr/>
+        </p:nvCxnSpPr>
+        <p:spPr>
+          <a:xfrm>
+            <a:off x="1656000" y="691200"/>
+            <a:ext cx="1296000" cy="0"/>
+          </a:xfrm>
+          <a:prstGeom prst="line">
+            <a:avLst/>
+          </a:prstGeom>
+          <a:ln w="3600">
+            <a:solidFill>
+              <a:srgbClr val="2365A4"/>
+            </a:solidFill>
+          </a:ln>
+        </p:spPr>
+      </p:cxnSp>
+      <p:sp>
+        <p:nvSpPr>
+          <p:cNvPr id="10" name="텍스트"/>
+          <p:cNvSpPr txBox="1"/>
+          <p:nvPr/>
+        </p:nvSpPr>
+        <p:spPr>
+          <a:xfrm>
+            <a:off x="252000" y="813600"/>
+            <a:ext cx="216000" cy="99061"/>
+          </a:xfrm>
+          <a:prstGeom prst="rect">
+            <a:avLst/>
+          </a:prstGeom>
+          <a:noFill/>
+        </p:spPr>
+        <p:txBody>
+          <a:bodyPr wrap="square" lIns="0" rIns="0" tIns="0" bIns="0" anchor="t">
+            <a:spAutoFit/>
+          </a:bodyPr>
+          <a:lstStyle/>
+          <a:p>
+            <a:pPr algn="l">
+              <a:lnSpc>
+                <a:spcPts val="754"/>
+              </a:lnSpc>
+            </a:pPr>
+            <a:r>
+              <a:rPr sz="520" b="1" spc="100">
+                <a:solidFill>
+                  <a:srgbClr val="12151C"/>
+                </a:solidFill>
+                <a:latin typeface="맑은 고딕"/>
+                <a:ea typeface="맑은 고딕"/>
+              </a:rPr>
+              <a:t>03</a:t>
+            </a:r>
+          </a:p>
+        </p:txBody>
+      </p:sp>
+      <p:sp>
+        <p:nvSpPr>
+          <p:cNvPr id="11" name="텍스트"/>
+          <p:cNvSpPr txBox="1"/>
+          <p:nvPr/>
+        </p:nvSpPr>
+        <p:spPr>
+          <a:xfrm>
+            <a:off x="475200" y="802800"/>
+            <a:ext cx="1152000" cy="140971"/>
+          </a:xfrm>
+          <a:prstGeom prst="rect">
+            <a:avLst/>
+          </a:prstGeom>
+          <a:noFill/>
+        </p:spPr>
+        <p:txBody>
+          <a:bodyPr wrap="square" lIns="0" rIns="0" tIns="0" bIns="0" anchor="t">
+            <a:spAutoFit/>
+          </a:bodyPr>
+          <a:lstStyle/>
+          <a:p>
+            <a:pPr algn="l">
+              <a:lnSpc>
+                <a:spcPts val="1073"/>
+              </a:lnSpc>
+            </a:pPr>
+            <a:r>
+              <a:rPr sz="740" b="0">
+                <a:solidFill>
+                  <a:srgbClr val="12151C"/>
+                </a:solidFill>
+                <a:latin typeface="맑은 고딕"/>
+                <a:ea typeface="맑은 고딕"/>
+              </a:rPr>
+              <a:t>제휴 문의</a:t>
+            </a:r>
+          </a:p>
+        </p:txBody>
+      </p:sp>
+      <p:cxnSp>
+        <p:nvCxnSpPr>
+          <p:cNvPr id="12" name="Connector 11"/>
+          <p:cNvCxnSpPr/>
+          <p:nvPr/>
+        </p:nvCxnSpPr>
+        <p:spPr>
+          <a:xfrm>
+            <a:off x="252000" y="1036800"/>
+            <a:ext cx="1296000" cy="0"/>
+          </a:xfrm>
+          <a:prstGeom prst="line">
+            <a:avLst/>
+          </a:prstGeom>
+          <a:ln w="3600">
+            <a:solidFill>
+              <a:srgbClr val="2365A4"/>
+            </a:solidFill>
+          </a:ln>
+        </p:spPr>
+      </p:cxnSp>
+      <p:sp>
+        <p:nvSpPr>
+          <p:cNvPr id="13" name="텍스트"/>
+          <p:cNvSpPr txBox="1"/>
+          <p:nvPr/>
+        </p:nvSpPr>
+        <p:spPr>
+          <a:xfrm>
+            <a:off x="1656000" y="813600"/>
+            <a:ext cx="216000" cy="99061"/>
+          </a:xfrm>
+          <a:prstGeom prst="rect">
+            <a:avLst/>
+          </a:prstGeom>
+          <a:noFill/>
+        </p:spPr>
+        <p:txBody>
+          <a:bodyPr wrap="square" lIns="0" rIns="0" tIns="0" bIns="0" anchor="t">
+            <a:spAutoFit/>
+          </a:bodyPr>
+          <a:lstStyle/>
+          <a:p>
+            <a:pPr algn="l">
+              <a:lnSpc>
+                <a:spcPts val="754"/>
+              </a:lnSpc>
+            </a:pPr>
+            <a:r>
+              <a:rPr sz="520" b="1" spc="100">
+                <a:solidFill>
+                  <a:srgbClr val="12151C"/>
+                </a:solidFill>
+                <a:latin typeface="맑은 고딕"/>
+                <a:ea typeface="맑은 고딕"/>
+              </a:rPr>
+              <a:t>04</a:t>
+            </a:r>
+          </a:p>
+        </p:txBody>
+      </p:sp>
+      <p:sp>
+        <p:nvSpPr>
+          <p:cNvPr id="14" name="텍스트"/>
+          <p:cNvSpPr txBox="1"/>
+          <p:nvPr/>
+        </p:nvSpPr>
+        <p:spPr>
+          <a:xfrm>
+            <a:off x="1879200" y="802800"/>
+            <a:ext cx="1152000" cy="140971"/>
+          </a:xfrm>
+          <a:prstGeom prst="rect">
+            <a:avLst/>
+          </a:prstGeom>
+          <a:noFill/>
+        </p:spPr>
+        <p:txBody>
+          <a:bodyPr wrap="square" lIns="0" rIns="0" tIns="0" bIns="0" anchor="t">
+            <a:spAutoFit/>
+          </a:bodyPr>
+          <a:lstStyle/>
+          <a:p>
+            <a:pPr algn="l">
+              <a:lnSpc>
+                <a:spcPts val="1073"/>
+              </a:lnSpc>
+            </a:pPr>
+            <a:r>
+              <a:rPr sz="740" b="0">
+                <a:solidFill>
+                  <a:srgbClr val="12151C"/>
+                </a:solidFill>
+                <a:latin typeface="맑은 고딕"/>
+                <a:ea typeface="맑은 고딕"/>
+              </a:rPr>
+              <a:t>품질 관리</a:t>
+            </a:r>
+          </a:p>
+        </p:txBody>
+      </p:sp>
+      <p:cxnSp>
+        <p:nvCxnSpPr>
+          <p:cNvPr id="15" name="Connector 14"/>
+          <p:cNvCxnSpPr/>
+          <p:nvPr/>
+        </p:nvCxnSpPr>
+        <p:spPr>
+          <a:xfrm>
+            <a:off x="1656000" y="1036800"/>
+            <a:ext cx="1296000" cy="0"/>
+          </a:xfrm>
+          <a:prstGeom prst="line">
+            <a:avLst/>
+          </a:prstGeom>
+          <a:ln w="3600">
+            <a:solidFill>
+              <a:srgbClr val="2365A4"/>
+            </a:solidFill>
+          </a:ln>
+        </p:spPr>
+      </p:cxnSp>
+      <p:sp>
+        <p:nvSpPr>
+          <p:cNvPr id="16" name="텍스트"/>
+          <p:cNvSpPr txBox="1"/>
+          <p:nvPr/>
+        </p:nvSpPr>
+        <p:spPr>
+          <a:xfrm>
+            <a:off x="252000" y="1569600"/>
+            <a:ext cx="1368000" cy="114301"/>
+          </a:xfrm>
+          <a:prstGeom prst="rect">
+            <a:avLst/>
+          </a:prstGeom>
+          <a:noFill/>
+        </p:spPr>
+        <p:txBody>
+          <a:bodyPr wrap="square" lIns="0" rIns="0" tIns="0" bIns="0" anchor="t">
+            <a:spAutoFit/>
+          </a:bodyPr>
+          <a:lstStyle/>
+          <a:p>
+            <a:pPr algn="l">
+              <a:lnSpc>
+                <a:spcPts val="869"/>
+              </a:lnSpc>
+            </a:pPr>
+            <a:r>
+              <a:rPr sz="600" b="0">
                 <a:solidFill>
                   <a:srgbClr val="18324E"/>
                 </a:solidFill>
                 <a:latin typeface="맑은 고딕"/>
                 <a:ea typeface="맑은 고딕"/>
               </a:rPr>
-              <a:t>회사명 · 부서명</a:t>
+              <a:t>평일 09:30 – 18:30</a:t>
+            </a:r>
+          </a:p>
+        </p:txBody>
+      </p:sp>
+      <p:sp>
+        <p:nvSpPr>
+          <p:cNvPr id="17" name="텍스트"/>
+          <p:cNvSpPr txBox="1"/>
+          <p:nvPr/>
+        </p:nvSpPr>
+        <p:spPr>
+          <a:xfrm>
+            <a:off x="1620000" y="1569600"/>
+            <a:ext cx="1368000" cy="114301"/>
+          </a:xfrm>
+          <a:prstGeom prst="rect">
+            <a:avLst/>
+          </a:prstGeom>
+          <a:noFill/>
+        </p:spPr>
+        <p:txBody>
+          <a:bodyPr wrap="square" lIns="0" rIns="0" tIns="0" bIns="0" anchor="t">
+            <a:spAutoFit/>
+          </a:bodyPr>
+          <a:lstStyle/>
+          <a:p>
+            <a:pPr algn="r">
+              <a:lnSpc>
+                <a:spcPts val="869"/>
+              </a:lnSpc>
+            </a:pPr>
+            <a:r>
+              <a:rPr sz="600" b="0">
+                <a:solidFill>
+                  <a:srgbClr val="18324E"/>
+                </a:solidFill>
+                <a:latin typeface="맑은 고딕"/>
+                <a:ea typeface="맑은 고딕"/>
+              </a:rPr>
+              <a:t>www.example.com</a:t>
             </a:r>
           </a:p>
         </p:txBody>
